--- a/day1/slides/intro.pptx
+++ b/day1/slides/intro.pptx
@@ -214,7 +214,7 @@
           <a:p>
             <a:fld id="{D49A0B7E-B595-B14C-B05F-40313997F4EC}" type="datetimeFigureOut">
               <a:rPr lang="en-US" smtClean="0"/>
-              <a:t>5/5/25</a:t>
+              <a:t>5/8/26</a:t>
             </a:fld>
             <a:endParaRPr lang="en-US"/>
           </a:p>
@@ -631,15 +631,6 @@
               <a:t>We’ll sit down at the end of this session with anyone running windows and help them set up the Windows Subsystem for Linux (WSL)</a:t>
             </a:r>
           </a:p>
-          <a:p>
-            <a:endParaRPr lang="en-US" dirty="0"/>
-          </a:p>
-          <a:p>
-            <a:r>
-              <a:rPr lang="en-US" dirty="0"/>
-              <a:t>For Windows users, those who don’t have a Mac or Linux machine, terminal can be a bit more difficult to find and use but it is possible. There’s a couple extra steps that you have to do get it so be sure to come and talk to us if you want/need help with getting that set up on your Windows machine.</a:t>
-            </a:r>
-          </a:p>
         </p:txBody>
       </p:sp>
       <p:sp>
@@ -869,7 +860,50 @@
             </a:r>
             <a:r>
               <a:rPr lang="en-US" dirty="0"/>
-              <a:t> Notebooks and Spyder, so it’s kind of like a main menu of all the different ways you can run Python. We will talk more in depth about Anaconda and things you can do with it later in the bootcamp course. Python 2.7 and below are deprecated, which means the programmers who run Python do not offer support or code for any versions older than Python 2.7. So, again, this website will let you download Python if it’s not already installed and update it if your machine has it pre-installed with the latest version of Python which is 3.11.</a:t>
+              <a:t> Notebooks and Spyder, so it’s kind of like a main menu of all the different ways you can run Python. We will talk more in depth about Anaconda and things you can do with it later in the bootcamp course. Python 2.7 and below are deprecated, which means the programmers who run Python do not offer support or code for any versions older than Python 2.7. So, again, this website will let you download Python if it’s not already installed and update it if your machine has it pre-installed with the latest version of Python.</a:t>
+            </a:r>
+          </a:p>
+          <a:p>
+            <a:pPr marL="0" marR="0" lvl="0" indent="0" algn="l" defTabSz="914400" rtl="0" eaLnBrk="1" fontAlgn="auto" latinLnBrk="0" hangingPunct="1">
+              <a:lnSpc>
+                <a:spcPct val="100000"/>
+              </a:lnSpc>
+              <a:spcBef>
+                <a:spcPts val="0"/>
+              </a:spcBef>
+              <a:spcAft>
+                <a:spcPts val="0"/>
+              </a:spcAft>
+              <a:buClrTx/>
+              <a:buSzTx/>
+              <a:buFontTx/>
+              <a:buNone/>
+              <a:tabLst/>
+              <a:defRPr/>
+            </a:pPr>
+            <a:endParaRPr lang="en-US" dirty="0"/>
+          </a:p>
+          <a:p>
+            <a:pPr marL="0" marR="0" lvl="0" indent="0" algn="l" defTabSz="914400" rtl="0" eaLnBrk="1" fontAlgn="auto" latinLnBrk="0" hangingPunct="1">
+              <a:lnSpc>
+                <a:spcPct val="100000"/>
+              </a:lnSpc>
+              <a:spcBef>
+                <a:spcPts val="0"/>
+              </a:spcBef>
+              <a:spcAft>
+                <a:spcPts val="0"/>
+              </a:spcAft>
+              <a:buClrTx/>
+              <a:buSzTx/>
+              <a:buFontTx/>
+              <a:buNone/>
+              <a:tabLst/>
+              <a:defRPr/>
+            </a:pPr>
+            <a:r>
+              <a:rPr lang="en-US" dirty="0"/>
+              <a:t>Note: If you have a Windows machine, you should be able to install anaconda in your WSL environment and still have the full graphical user interface. Software development is typically a lot easier to manage on Linux than Windows, so I strongly recommend that you figure out how to get anaconda setup in a Linux environment now to save yourself trouble later.</a:t>
             </a:r>
           </a:p>
           <a:p>
@@ -957,10 +991,7 @@
           <a:bodyPr/>
           <a:lstStyle/>
           <a:p>
-            <a:r>
-              <a:rPr lang="en-US" dirty="0"/>
-              <a:t>Today, Wednesday, Friday (Anaconda too, documentation is important throughout different packages or libraries, going over exercises), Monday (second week is going more into detail about object-oriented programming, something we’ll talk a little bit about today), Wednesday (inheritance and composition are powerful tools), Thursday (not coding more, but coding better) Less is more! </a:t>
-            </a:r>
+            <a:endParaRPr lang="en-US" dirty="0"/>
           </a:p>
         </p:txBody>
       </p:sp>
@@ -1067,6 +1098,15 @@
               <a:t>This bootcamp is for YOU – there are no grades, no penalty if you don’t get through all the material. We want to start developing good habits that you will rely on the rest of your career.</a:t>
             </a:r>
           </a:p>
+          <a:p>
+            <a:endParaRPr lang="en-US" dirty="0"/>
+          </a:p>
+          <a:p>
+            <a:r>
+              <a:rPr lang="en-US" dirty="0"/>
+              <a:t>Note on LLMs: They can be incredibly useful for programming once you know you way around Python, but you need to be the software engineer. Do not vibe code research projects. The companies pushing AI/LLMs can often afford to have mistakes in their code. We as scientists cannot.</a:t>
+            </a:r>
+          </a:p>
         </p:txBody>
       </p:sp>
       <p:sp>
@@ -1285,7 +1325,76 @@
             </a:pPr>
             <a:r>
               <a:rPr lang="en-US" dirty="0"/>
-              <a:t>About current capabilities in Python, general census is most, if not all of you, have coded before. You’ve written code for class or research. </a:t>
+              <a:t>Ask how many people have done python coding for:</a:t>
+            </a:r>
+          </a:p>
+          <a:p>
+            <a:pPr marL="0" marR="0" lvl="0" indent="0" algn="l" defTabSz="914400" rtl="0" eaLnBrk="1" fontAlgn="auto" latinLnBrk="0" hangingPunct="1">
+              <a:lnSpc>
+                <a:spcPct val="100000"/>
+              </a:lnSpc>
+              <a:spcBef>
+                <a:spcPts val="0"/>
+              </a:spcBef>
+              <a:spcAft>
+                <a:spcPts val="0"/>
+              </a:spcAft>
+              <a:buClrTx/>
+              <a:buSzTx/>
+              <a:buFontTx/>
+              <a:buNone/>
+              <a:tabLst/>
+              <a:defRPr/>
+            </a:pPr>
+            <a:r>
+              <a:rPr lang="en-US" dirty="0"/>
+              <a:t>Undergraduate research</a:t>
+            </a:r>
+          </a:p>
+          <a:p>
+            <a:pPr marL="0" marR="0" lvl="0" indent="0" algn="l" defTabSz="914400" rtl="0" eaLnBrk="1" fontAlgn="auto" latinLnBrk="0" hangingPunct="1">
+              <a:lnSpc>
+                <a:spcPct val="100000"/>
+              </a:lnSpc>
+              <a:spcBef>
+                <a:spcPts val="0"/>
+              </a:spcBef>
+              <a:spcAft>
+                <a:spcPts val="0"/>
+              </a:spcAft>
+              <a:buClrTx/>
+              <a:buSzTx/>
+              <a:buFontTx/>
+              <a:buNone/>
+              <a:tabLst/>
+              <a:defRPr/>
+            </a:pPr>
+            <a:r>
+              <a:rPr lang="en-US" dirty="0"/>
+              <a:t>School/class project</a:t>
+            </a:r>
+          </a:p>
+          <a:p>
+            <a:pPr marL="0" marR="0" lvl="0" indent="0" algn="l" defTabSz="914400" rtl="0" eaLnBrk="1" fontAlgn="auto" latinLnBrk="0" hangingPunct="1">
+              <a:lnSpc>
+                <a:spcPct val="100000"/>
+              </a:lnSpc>
+              <a:spcBef>
+                <a:spcPts val="0"/>
+              </a:spcBef>
+              <a:spcAft>
+                <a:spcPts val="0"/>
+              </a:spcAft>
+              <a:buClrTx/>
+              <a:buSzTx/>
+              <a:buFontTx/>
+              <a:buNone/>
+              <a:tabLst/>
+              <a:defRPr/>
+            </a:pPr>
+            <a:r>
+              <a:rPr lang="en-US" dirty="0"/>
+              <a:t>Personal projects/for fun</a:t>
             </a:r>
           </a:p>
           <a:p>
@@ -1396,6 +1505,20 @@
               <a:t>We will provide some notebooks to learn and review material, but many of the exercises and group challenges are best done in text files. I encourage everyone to practice using text files in this bootcamp, since most of you are less familiar with that way of coding</a:t>
             </a:r>
           </a:p>
+          <a:p>
+            <a:endParaRPr lang="en-US" dirty="0"/>
+          </a:p>
+          <a:p>
+            <a:r>
+              <a:rPr lang="en-US" dirty="0"/>
+              <a:t>Ask who the person that responded they have written shell scripts before is. Have that person help guide people through </a:t>
+            </a:r>
+            <a:r>
+              <a:rPr lang="en-US" dirty="0" err="1"/>
+              <a:t>Bashlandia</a:t>
+            </a:r>
+            <a:endParaRPr lang="en-US" dirty="0"/>
+          </a:p>
         </p:txBody>
       </p:sp>
       <p:sp>
@@ -1694,7 +1817,10 @@
           <a:bodyPr/>
           <a:lstStyle/>
           <a:p>
-            <a:endParaRPr lang="en-US" dirty="0"/>
+            <a:r>
+              <a:rPr lang="en-US" dirty="0"/>
+              <a:t>I recommend VS code because its lightweight and it has a huge number of extensions that add functionality for many programming languages and development environments.</a:t>
+            </a:r>
           </a:p>
         </p:txBody>
       </p:sp>
@@ -1907,7 +2033,15 @@
           <a:p>
             <a:r>
               <a:rPr lang="en-US" dirty="0"/>
-              <a:t>Works the same as a Finder window basically, if you have a Mac you have a built in terminal application. iTerm2 is an application that can replace your terminal and functions just the same. Terminals are also cool because you run python code line by line in them, so if you wanted to import or update already installed Python packages or libraries, you can do it right there instead of in your notebook or text editor.</a:t>
+              <a:t>The default MacOS terminal is really bad, iTerm2 allows you to have different terminal tabs and switch between them with </a:t>
+            </a:r>
+            <a:r>
+              <a:rPr lang="en-US" dirty="0" err="1"/>
+              <a:t>keybinds</a:t>
+            </a:r>
+            <a:r>
+              <a:rPr lang="en-US" dirty="0"/>
+              <a:t>. </a:t>
             </a:r>
           </a:p>
         </p:txBody>
@@ -2065,6 +2199,13 @@
             <a:schemeClr val="lt1"/>
           </a:fontRef>
         </p:style>
+        <p:txBody>
+          <a:bodyPr/>
+          <a:lstStyle/>
+          <a:p>
+            <a:endParaRPr lang="en-US"/>
+          </a:p>
+        </p:txBody>
       </p:sp>
       <p:sp>
         <p:nvSpPr>
@@ -2103,6 +2244,13 @@
             <a:schemeClr val="lt1"/>
           </a:fontRef>
         </p:style>
+        <p:txBody>
+          <a:bodyPr/>
+          <a:lstStyle/>
+          <a:p>
+            <a:endParaRPr lang="en-US"/>
+          </a:p>
+        </p:txBody>
       </p:sp>
       <p:sp>
         <p:nvSpPr>
@@ -2224,7 +2372,7 @@
           <a:p>
             <a:fld id="{51673806-0BCD-1F42-BAA8-2011034B3C6A}" type="datetimeFigureOut">
               <a:rPr lang="en-US" smtClean="0"/>
-              <a:t>5/5/25</a:t>
+              <a:t>5/8/26</a:t>
             </a:fld>
             <a:endParaRPr lang="en-US"/>
           </a:p>
@@ -2638,7 +2786,7 @@
           <a:p>
             <a:fld id="{51673806-0BCD-1F42-BAA8-2011034B3C6A}" type="datetimeFigureOut">
               <a:rPr lang="en-US" smtClean="0"/>
-              <a:t>5/5/25</a:t>
+              <a:t>5/8/26</a:t>
             </a:fld>
             <a:endParaRPr lang="en-US"/>
           </a:p>
@@ -2969,7 +3117,7 @@
           <a:p>
             <a:fld id="{51673806-0BCD-1F42-BAA8-2011034B3C6A}" type="datetimeFigureOut">
               <a:rPr lang="en-US" smtClean="0"/>
-              <a:t>5/5/25</a:t>
+              <a:t>5/8/26</a:t>
             </a:fld>
             <a:endParaRPr lang="en-US"/>
           </a:p>
@@ -3369,7 +3517,7 @@
           <a:p>
             <a:fld id="{51673806-0BCD-1F42-BAA8-2011034B3C6A}" type="datetimeFigureOut">
               <a:rPr lang="en-US" smtClean="0"/>
-              <a:t>5/5/25</a:t>
+              <a:t>5/8/26</a:t>
             </a:fld>
             <a:endParaRPr lang="en-US"/>
           </a:p>
@@ -3932,7 +4080,7 @@
           <a:p>
             <a:fld id="{51673806-0BCD-1F42-BAA8-2011034B3C6A}" type="datetimeFigureOut">
               <a:rPr lang="en-US" smtClean="0"/>
-              <a:t>5/5/25</a:t>
+              <a:t>5/8/26</a:t>
             </a:fld>
             <a:endParaRPr lang="en-US"/>
           </a:p>
@@ -4608,7 +4756,7 @@
           <a:p>
             <a:fld id="{51673806-0BCD-1F42-BAA8-2011034B3C6A}" type="datetimeFigureOut">
               <a:rPr lang="en-US" smtClean="0"/>
-              <a:t>5/5/25</a:t>
+              <a:t>5/8/26</a:t>
             </a:fld>
             <a:endParaRPr lang="en-US"/>
           </a:p>
@@ -5516,7 +5664,7 @@
           <a:p>
             <a:fld id="{51673806-0BCD-1F42-BAA8-2011034B3C6A}" type="datetimeFigureOut">
               <a:rPr lang="en-US" smtClean="0"/>
-              <a:t>5/5/25</a:t>
+              <a:t>5/8/26</a:t>
             </a:fld>
             <a:endParaRPr lang="en-US"/>
           </a:p>
@@ -5824,7 +5972,7 @@
           <a:p>
             <a:fld id="{51673806-0BCD-1F42-BAA8-2011034B3C6A}" type="datetimeFigureOut">
               <a:rPr lang="en-US" smtClean="0"/>
-              <a:t>5/5/25</a:t>
+              <a:t>5/8/26</a:t>
             </a:fld>
             <a:endParaRPr lang="en-US"/>
           </a:p>
@@ -6083,7 +6231,7 @@
           <a:p>
             <a:fld id="{51673806-0BCD-1F42-BAA8-2011034B3C6A}" type="datetimeFigureOut">
               <a:rPr lang="en-US" smtClean="0"/>
-              <a:t>5/5/25</a:t>
+              <a:t>5/8/26</a:t>
             </a:fld>
             <a:endParaRPr lang="en-US"/>
           </a:p>
@@ -6275,6 +6423,13 @@
             <a:schemeClr val="lt1"/>
           </a:fontRef>
         </p:style>
+        <p:txBody>
+          <a:bodyPr/>
+          <a:lstStyle/>
+          <a:p>
+            <a:endParaRPr lang="en-US"/>
+          </a:p>
+        </p:txBody>
       </p:sp>
       <p:sp>
         <p:nvSpPr>
@@ -6313,22 +6468,29 @@
             <a:schemeClr val="lt1"/>
           </a:fontRef>
         </p:style>
-      </p:sp>
-      <p:sp>
-        <p:nvSpPr>
-          <p:cNvPr id="2" name="Title 1"/>
-          <p:cNvSpPr>
-            <a:spLocks noGrp="1"/>
-          </p:cNvSpPr>
-          <p:nvPr>
-            <p:ph type="title"/>
-          </p:nvPr>
-        </p:nvSpPr>
-        <p:spPr/>
         <p:txBody>
           <a:bodyPr/>
           <a:lstStyle/>
           <a:p>
+            <a:endParaRPr lang="en-US"/>
+          </a:p>
+        </p:txBody>
+      </p:sp>
+      <p:sp>
+        <p:nvSpPr>
+          <p:cNvPr id="2" name="Title 1"/>
+          <p:cNvSpPr>
+            <a:spLocks noGrp="1"/>
+          </p:cNvSpPr>
+          <p:nvPr>
+            <p:ph type="title"/>
+          </p:nvPr>
+        </p:nvSpPr>
+        <p:spPr/>
+        <p:txBody>
+          <a:bodyPr/>
+          <a:lstStyle/>
+          <a:p>
             <a:r>
               <a:rPr lang="en-US"/>
               <a:t>Click to edit Master title style</a:t>
@@ -6406,7 +6568,7 @@
           <a:p>
             <a:fld id="{51673806-0BCD-1F42-BAA8-2011034B3C6A}" type="datetimeFigureOut">
               <a:rPr lang="en-US" smtClean="0"/>
-              <a:t>5/5/25</a:t>
+              <a:t>5/8/26</a:t>
             </a:fld>
             <a:endParaRPr lang="en-US"/>
           </a:p>
@@ -6790,7 +6952,7 @@
           <a:p>
             <a:fld id="{51673806-0BCD-1F42-BAA8-2011034B3C6A}" type="datetimeFigureOut">
               <a:rPr lang="en-US" smtClean="0"/>
-              <a:t>5/5/25</a:t>
+              <a:t>5/8/26</a:t>
             </a:fld>
             <a:endParaRPr lang="en-US"/>
           </a:p>
@@ -7166,7 +7328,7 @@
           <a:p>
             <a:fld id="{51673806-0BCD-1F42-BAA8-2011034B3C6A}" type="datetimeFigureOut">
               <a:rPr lang="en-US" smtClean="0"/>
-              <a:t>5/5/25</a:t>
+              <a:t>5/8/26</a:t>
             </a:fld>
             <a:endParaRPr lang="en-US"/>
           </a:p>
@@ -7672,7 +7834,7 @@
           <a:p>
             <a:fld id="{51673806-0BCD-1F42-BAA8-2011034B3C6A}" type="datetimeFigureOut">
               <a:rPr lang="en-US" smtClean="0"/>
-              <a:t>5/5/25</a:t>
+              <a:t>5/8/26</a:t>
             </a:fld>
             <a:endParaRPr lang="en-US"/>
           </a:p>
@@ -7929,7 +8091,7 @@
           <a:p>
             <a:fld id="{51673806-0BCD-1F42-BAA8-2011034B3C6A}" type="datetimeFigureOut">
               <a:rPr lang="en-US" smtClean="0"/>
-              <a:t>5/5/25</a:t>
+              <a:t>5/8/26</a:t>
             </a:fld>
             <a:endParaRPr lang="en-US"/>
           </a:p>
@@ -8087,7 +8249,7 @@
           <a:p>
             <a:fld id="{51673806-0BCD-1F42-BAA8-2011034B3C6A}" type="datetimeFigureOut">
               <a:rPr lang="en-US" smtClean="0"/>
-              <a:t>5/5/25</a:t>
+              <a:t>5/8/26</a:t>
             </a:fld>
             <a:endParaRPr lang="en-US"/>
           </a:p>
@@ -8477,7 +8639,7 @@
           <a:p>
             <a:fld id="{51673806-0BCD-1F42-BAA8-2011034B3C6A}" type="datetimeFigureOut">
               <a:rPr lang="en-US" smtClean="0"/>
-              <a:t>5/5/25</a:t>
+              <a:t>5/8/26</a:t>
             </a:fld>
             <a:endParaRPr lang="en-US"/>
           </a:p>
@@ -8886,7 +9048,7 @@
           <a:p>
             <a:fld id="{51673806-0BCD-1F42-BAA8-2011034B3C6A}" type="datetimeFigureOut">
               <a:rPr lang="en-US" smtClean="0"/>
-              <a:t>5/5/25</a:t>
+              <a:t>5/8/26</a:t>
             </a:fld>
             <a:endParaRPr lang="en-US"/>
           </a:p>
@@ -9132,7 +9294,7 @@
             <a:fld id="{51673806-0BCD-1F42-BAA8-2011034B3C6A}" type="datetimeFigureOut">
               <a:rPr lang="en-US" smtClean="0"/>
               <a:pPr/>
-              <a:t>5/5/25</a:t>
+              <a:t>5/8/26</a:t>
             </a:fld>
             <a:endParaRPr lang="en-US" dirty="0"/>
           </a:p>
@@ -9716,7 +9878,7 @@
             </a:r>
             <a:r>
               <a:rPr lang="en-US" dirty="0"/>
-              <a:t> all they do is open, create, edit, etc. plain text files </a:t>
+              <a:t> all they do is open, create, edit, and save plain text files </a:t>
             </a:r>
           </a:p>
           <a:p>
@@ -9746,20 +9908,8 @@
             </a:pPr>
             <a:r>
               <a:rPr lang="en-US" dirty="0"/>
-              <a:t>I recommend Sublime Text </a:t>
-            </a:r>
-          </a:p>
-          <a:p>
-            <a:pPr marL="0" indent="0">
-              <a:buNone/>
-            </a:pPr>
-            <a:r>
-              <a:rPr lang="en-US" dirty="0">
-                <a:hlinkClick r:id="rId3"/>
-              </a:rPr>
-              <a:t>https://www.sublimetext.com/</a:t>
-            </a:r>
-            <a:endParaRPr lang="en-US" dirty="0"/>
+              <a:t>I recommend using VS Code as a text editor too. </a:t>
+            </a:r>
           </a:p>
         </p:txBody>
       </p:sp>
@@ -9778,7 +9928,7 @@
           <p:nvPr/>
         </p:nvPicPr>
         <p:blipFill>
-          <a:blip r:embed="rId4">
+          <a:blip r:embed="rId3">
             <a:extLst>
               <a:ext uri="{28A0092B-C50C-407E-A947-70E740481C1C}">
                 <a14:useLocalDpi xmlns:a14="http://schemas.microsoft.com/office/drawing/2010/main" val="0"/>
@@ -9869,7 +10019,7 @@
         </p:spPr>
         <p:txBody>
           <a:bodyPr>
-            <a:normAutofit/>
+            <a:normAutofit lnSpcReduction="10000"/>
           </a:bodyPr>
           <a:lstStyle/>
           <a:p>
@@ -9878,30 +10028,7 @@
             </a:pPr>
             <a:r>
               <a:rPr lang="en-US" dirty="0"/>
-              <a:t>I </a:t>
-            </a:r>
-            <a:r>
-              <a:rPr lang="en-US" dirty="0" err="1"/>
-              <a:t>recommand</a:t>
-            </a:r>
-            <a:r>
-              <a:rPr lang="en-US" dirty="0"/>
-              <a:t> iTerm2 </a:t>
-            </a:r>
-          </a:p>
-          <a:p>
-            <a:pPr lvl="1"/>
-            <a:r>
-              <a:rPr lang="en-US" dirty="0"/>
-              <a:t>Terminal</a:t>
-            </a:r>
-            <a:r>
-              <a:rPr lang="en-US" i="1" dirty="0"/>
-              <a:t> replacement</a:t>
-            </a:r>
-            <a:r>
-              <a:rPr lang="en-US" dirty="0"/>
-              <a:t> </a:t>
+              <a:t>I recommend iTerm2 for MacOS and the Windows Terminal for Windows</a:t>
             </a:r>
           </a:p>
           <a:p>
@@ -9918,6 +10045,28 @@
             </a:r>
           </a:p>
           <a:p>
+            <a:pPr lvl="1"/>
+            <a:r>
+              <a:rPr lang="en-US" dirty="0">
+                <a:hlinkClick r:id="rId4"/>
+              </a:rPr>
+              <a:t>https://apps.microsoft.com/detail/9n0dx20hk701</a:t>
+            </a:r>
+            <a:r>
+              <a:rPr lang="en-US" dirty="0"/>
+              <a:t> </a:t>
+            </a:r>
+          </a:p>
+          <a:p>
+            <a:pPr marL="0" indent="0">
+              <a:buNone/>
+            </a:pPr>
+            <a:r>
+              <a:rPr lang="en-US" dirty="0"/>
+              <a:t>Think of the terminal as an alternative to having a graphical user interface (the desktop)</a:t>
+            </a:r>
+          </a:p>
+          <a:p>
             <a:pPr marL="0" indent="0">
               <a:buNone/>
             </a:pPr>
@@ -9929,22 +10078,7 @@
             </a:pPr>
             <a:r>
               <a:rPr lang="en-US" dirty="0"/>
-              <a:t>You should think of a terminal as just a different interface on a Finder window with some extra programs built-in</a:t>
-            </a:r>
-          </a:p>
-          <a:p>
-            <a:pPr marL="0" indent="0">
-              <a:buNone/>
-            </a:pPr>
-            <a:endParaRPr lang="en-US" dirty="0"/>
-          </a:p>
-          <a:p>
-            <a:pPr marL="0" indent="0">
-              <a:buNone/>
-            </a:pPr>
-            <a:r>
-              <a:rPr lang="en-US" dirty="0"/>
-              <a:t>Tip: you can run python line-by-line in a terminal (</a:t>
+              <a:t>Tip: you can run python line-by-line in a terminal using interactive Python shell (</a:t>
             </a:r>
             <a:r>
               <a:rPr lang="en-US" i="1" dirty="0"/>
@@ -9975,7 +10109,7 @@
           <p:nvPr/>
         </p:nvPicPr>
         <p:blipFill>
-          <a:blip r:embed="rId4">
+          <a:blip r:embed="rId5">
             <a:extLst>
               <a:ext uri="{28A0092B-C50C-407E-A947-70E740481C1C}">
                 <a14:useLocalDpi xmlns:a14="http://schemas.microsoft.com/office/drawing/2010/main" val="0"/>
@@ -10071,15 +10205,9 @@
             <a:pPr marL="0" indent="0">
               <a:buNone/>
             </a:pPr>
-            <a:endParaRPr lang="en-US" i="1" dirty="0"/>
-          </a:p>
-          <a:p>
-            <a:pPr marL="0" indent="0">
-              <a:buNone/>
-            </a:pPr>
-            <a:r>
-              <a:rPr lang="en-US" dirty="0"/>
-              <a:t>If you’re running Windows, your terminal will be different than some of the notes and exercises here, unless you take some extra steps at the beginning to set up a bash interpreter (e.g. WSL). </a:t>
+            <a:r>
+              <a:rPr lang="en-US" dirty="0"/>
+              <a:t>If you’re running Windows, you will need to install WSL (Windows Subsystem for Linux), which will give you a Linux terminal and allow you to install Linux programs on your computer. </a:t>
             </a:r>
           </a:p>
           <a:p>
@@ -10087,6 +10215,15 @@
               <a:buNone/>
             </a:pPr>
             <a:endParaRPr lang="en-US" dirty="0"/>
+          </a:p>
+          <a:p>
+            <a:pPr marL="0" indent="0">
+              <a:buNone/>
+            </a:pPr>
+            <a:r>
+              <a:rPr lang="en-US" dirty="0"/>
+              <a:t>Once you learn the basics, Linux isn’t that hard (I promise)</a:t>
+            </a:r>
           </a:p>
           <a:p>
             <a:pPr marL="0" indent="0">
@@ -10463,7 +10600,9 @@
           </a:xfrm>
         </p:spPr>
         <p:txBody>
-          <a:bodyPr/>
+          <a:bodyPr>
+            <a:normAutofit lnSpcReduction="10000"/>
+          </a:bodyPr>
           <a:lstStyle/>
           <a:p>
             <a:pPr marL="0" lvl="0" indent="0">
@@ -10506,45 +10645,6 @@
             </a:r>
           </a:p>
           <a:p>
-            <a:pPr marL="0" indent="0">
-              <a:lnSpc>
-                <a:spcPct val="100000"/>
-              </a:lnSpc>
-              <a:spcBef>
-                <a:spcPts val="0"/>
-              </a:spcBef>
-              <a:buNone/>
-            </a:pPr>
-            <a:endParaRPr lang="en-US" dirty="0"/>
-          </a:p>
-          <a:p>
-            <a:pPr marL="0" indent="0">
-              <a:lnSpc>
-                <a:spcPct val="100000"/>
-              </a:lnSpc>
-              <a:spcBef>
-                <a:spcPts val="0"/>
-              </a:spcBef>
-              <a:buNone/>
-            </a:pPr>
-            <a:endParaRPr lang="en-US" dirty="0"/>
-          </a:p>
-          <a:p>
-            <a:pPr marL="0" indent="0">
-              <a:lnSpc>
-                <a:spcPct val="100000"/>
-              </a:lnSpc>
-              <a:spcBef>
-                <a:spcPts val="0"/>
-              </a:spcBef>
-              <a:buNone/>
-            </a:pPr>
-            <a:r>
-              <a:rPr lang="en-US" dirty="0"/>
-              <a:t>Latest version of python: 3.13.3</a:t>
-            </a:r>
-          </a:p>
-          <a:p>
             <a:pPr lvl="1">
               <a:lnSpc>
                 <a:spcPct val="100000"/>
@@ -10555,7 +10655,34 @@
             </a:pPr>
             <a:r>
               <a:rPr lang="en-US" dirty="0"/>
-              <a:t>Most libraries now require &gt;= 3.8</a:t>
+              <a:t>Make sure you install it in WSL if you have a Windows computer!</a:t>
+            </a:r>
+          </a:p>
+          <a:p>
+            <a:pPr marL="0" indent="0">
+              <a:lnSpc>
+                <a:spcPct val="100000"/>
+              </a:lnSpc>
+              <a:spcBef>
+                <a:spcPts val="0"/>
+              </a:spcBef>
+              <a:buNone/>
+            </a:pPr>
+            <a:endParaRPr lang="en-US" dirty="0"/>
+          </a:p>
+          <a:p>
+            <a:pPr marL="0" indent="0">
+              <a:lnSpc>
+                <a:spcPct val="100000"/>
+              </a:lnSpc>
+              <a:spcBef>
+                <a:spcPts val="0"/>
+              </a:spcBef>
+              <a:buNone/>
+            </a:pPr>
+            <a:r>
+              <a:rPr lang="en-US" dirty="0"/>
+              <a:t>Latest version of python: 3.14.5</a:t>
             </a:r>
           </a:p>
           <a:p>
@@ -10569,11 +10696,25 @@
             </a:pPr>
             <a:r>
               <a:rPr lang="en-US" dirty="0"/>
-              <a:t>Python 3.9 will be deprecated October 2025</a:t>
-            </a:r>
-          </a:p>
-          <a:p>
-            <a:pPr marL="0" indent="0">
+              <a:t>Most libraries now require &gt;= 3.11</a:t>
+            </a:r>
+          </a:p>
+          <a:p>
+            <a:pPr lvl="1">
+              <a:lnSpc>
+                <a:spcPct val="100000"/>
+              </a:lnSpc>
+              <a:spcBef>
+                <a:spcPts val="0"/>
+              </a:spcBef>
+            </a:pPr>
+            <a:r>
+              <a:rPr lang="en-US" dirty="0"/>
+              <a:t>Usually* you want to install one major version below the latest for best package compatibility</a:t>
+            </a:r>
+          </a:p>
+          <a:p>
+            <a:pPr marL="457200" lvl="1" indent="0">
               <a:lnSpc>
                 <a:spcPct val="100000"/>
               </a:lnSpc>
@@ -10750,6 +10891,13 @@
             <a:r>
               <a:rPr lang="en-US" dirty="0"/>
               <a:t>How to read documentation</a:t>
+            </a:r>
+          </a:p>
+          <a:p>
+            <a:pPr lvl="2"/>
+            <a:r>
+              <a:rPr lang="en-US" dirty="0"/>
+              <a:t>We will talk about how AI/LLMs play into this</a:t>
             </a:r>
           </a:p>
           <a:p>
@@ -10925,6 +11073,13 @@
             <a:r>
               <a:rPr lang="en-US" dirty="0"/>
               <a:t>Coding forums, e.g. Stack Overflow</a:t>
+            </a:r>
+          </a:p>
+          <a:p>
+            <a:pPr lvl="1"/>
+            <a:r>
+              <a:rPr lang="en-US" dirty="0"/>
+              <a:t>Can be hit or miss honestly</a:t>
             </a:r>
           </a:p>
           <a:p>
@@ -11141,14 +11296,22 @@
               <a:buNone/>
             </a:pPr>
             <a:r>
-              <a:rPr lang="en-US" dirty="0"/>
-              <a:t>Don’t use:</a:t>
-            </a:r>
-          </a:p>
-          <a:p>
-            <a:r>
-              <a:rPr lang="en-US" dirty="0"/>
+              <a:rPr lang="en-US" b="1" dirty="0"/>
+              <a:t>Don’t use</a:t>
+            </a:r>
+            <a:r>
+              <a:rPr lang="en-US" dirty="0"/>
+              <a:t>:</a:t>
+            </a:r>
+          </a:p>
+          <a:p>
+            <a:r>
+              <a:rPr lang="en-US" b="1" dirty="0"/>
               <a:t>ChatGPT, Copilot, or other AI code generators</a:t>
+            </a:r>
+            <a:r>
+              <a:rPr lang="en-US" dirty="0"/>
+              <a:t>. You will not learn anything if you rely on these tools while you are learning. We will talk more about how to use LLMs effectively later.</a:t>
             </a:r>
           </a:p>
           <a:p>
@@ -11413,8 +11576,13 @@
             </a:pPr>
             <a:r>
               <a:rPr lang="en-US" dirty="0"/>
-              <a:t>Install Anaconda</a:t>
-            </a:r>
+              <a:t>Install Anaconda (unless you already have </a:t>
+            </a:r>
+            <a:r>
+              <a:rPr lang="en-US"/>
+              <a:t>a Python install you can use)</a:t>
+            </a:r>
+            <a:endParaRPr lang="en-US" dirty="0"/>
           </a:p>
           <a:p>
             <a:pPr marL="457200" indent="-457200">
@@ -11465,7 +11633,7 @@
             </a:pPr>
             <a:r>
               <a:rPr lang="en-US" dirty="0"/>
-              <a:t>Download course material</a:t>
+              <a:t>Download course material (small intro to git)</a:t>
             </a:r>
           </a:p>
           <a:p>
@@ -11478,9 +11646,12 @@
               <a:rPr lang="en-US" dirty="0">
                 <a:hlinkClick r:id="rId2"/>
               </a:rPr>
-              <a:t>https://github.com/lodubay/PythonBootcamp2025</a:t>
-            </a:r>
-            <a:endParaRPr lang="en-US" dirty="0"/>
+              <a:t>https://github.com/jacksondatkuliak/PythonBootcamp2026</a:t>
+            </a:r>
+            <a:r>
+              <a:rPr lang="en-US" dirty="0"/>
+              <a:t>  </a:t>
+            </a:r>
           </a:p>
           <a:p>
             <a:pPr marL="457200" indent="-457200">
@@ -11605,7 +11776,7 @@
             </a:pPr>
             <a:r>
               <a:rPr lang="en-US" sz="2400" dirty="0"/>
-              <a:t>Liam Dubay (5</a:t>
+              <a:t>Tawny Sit (5</a:t>
             </a:r>
             <a:r>
               <a:rPr lang="en-US" sz="2400" baseline="30000" dirty="0"/>
@@ -11627,7 +11798,7 @@
             </a:pPr>
             <a:r>
               <a:rPr lang="en-US" sz="2400" dirty="0"/>
-              <a:t>Tawny Sit (4</a:t>
+              <a:t>Jack Roberts (7</a:t>
             </a:r>
             <a:r>
               <a:rPr lang="en-US" sz="2400" baseline="30000" dirty="0"/>
@@ -11649,7 +11820,7 @@
             </a:pPr>
             <a:r>
               <a:rPr lang="en-US" sz="2400" dirty="0"/>
-              <a:t>Jack Roberts (6</a:t>
+              <a:t>Jackson Datkuliak (5</a:t>
             </a:r>
             <a:r>
               <a:rPr lang="en-US" sz="2400" baseline="30000" dirty="0"/>
@@ -11657,7 +11828,7 @@
             </a:r>
             <a:r>
               <a:rPr lang="en-US" sz="2400" dirty="0"/>
-              <a:t> year grad)</a:t>
+              <a:t> year undergrad)</a:t>
             </a:r>
           </a:p>
           <a:p>
@@ -11671,62 +11842,6 @@
             </a:pPr>
             <a:r>
               <a:rPr lang="en-US" sz="2400" dirty="0"/>
-              <a:t>Kaz Gary (4</a:t>
-            </a:r>
-            <a:r>
-              <a:rPr lang="en-US" sz="2400" baseline="30000" dirty="0"/>
-              <a:t>th</a:t>
-            </a:r>
-            <a:r>
-              <a:rPr lang="en-US" sz="2400" dirty="0"/>
-              <a:t> year grad)</a:t>
-            </a:r>
-          </a:p>
-          <a:p>
-            <a:pPr lvl="1">
-              <a:lnSpc>
-                <a:spcPct val="100000"/>
-              </a:lnSpc>
-              <a:spcBef>
-                <a:spcPts val="0"/>
-              </a:spcBef>
-            </a:pPr>
-            <a:r>
-              <a:rPr lang="en-US" sz="2400" dirty="0" err="1"/>
-              <a:t>Devisree</a:t>
-            </a:r>
-            <a:r>
-              <a:rPr lang="en-US" sz="2400" dirty="0"/>
-              <a:t> </a:t>
-            </a:r>
-            <a:r>
-              <a:rPr lang="en-US" sz="2400" dirty="0" err="1"/>
-              <a:t>Tallapaneni</a:t>
-            </a:r>
-            <a:r>
-              <a:rPr lang="en-US" sz="2400" dirty="0"/>
-              <a:t> (2</a:t>
-            </a:r>
-            <a:r>
-              <a:rPr lang="en-US" sz="2400" baseline="30000" dirty="0"/>
-              <a:t>nd</a:t>
-            </a:r>
-            <a:r>
-              <a:rPr lang="en-US" sz="2400" dirty="0"/>
-              <a:t> year grad)</a:t>
-            </a:r>
-          </a:p>
-          <a:p>
-            <a:pPr lvl="1">
-              <a:lnSpc>
-                <a:spcPct val="100000"/>
-              </a:lnSpc>
-              <a:spcBef>
-                <a:spcPts val="0"/>
-              </a:spcBef>
-            </a:pPr>
-            <a:r>
-              <a:rPr lang="en-US" sz="2400" dirty="0"/>
               <a:t>Sai </a:t>
             </a:r>
             <a:r>
@@ -11737,31 +11852,6 @@
               <a:rPr lang="en-US" sz="2400" dirty="0"/>
               <a:t> Senthil Nathan (senior undergrad)</a:t>
             </a:r>
-          </a:p>
-          <a:p>
-            <a:pPr lvl="1">
-              <a:lnSpc>
-                <a:spcPct val="100000"/>
-              </a:lnSpc>
-              <a:spcBef>
-                <a:spcPts val="0"/>
-              </a:spcBef>
-            </a:pPr>
-            <a:r>
-              <a:rPr lang="en-US" sz="2400" dirty="0"/>
-              <a:t>Amber Malpas (postdoc)</a:t>
-            </a:r>
-          </a:p>
-          <a:p>
-            <a:pPr marL="0" indent="0">
-              <a:lnSpc>
-                <a:spcPct val="100000"/>
-              </a:lnSpc>
-              <a:spcBef>
-                <a:spcPts val="0"/>
-              </a:spcBef>
-              <a:buNone/>
-            </a:pPr>
             <a:endParaRPr lang="en-US" dirty="0"/>
           </a:p>
           <a:p>
@@ -11993,7 +12083,7 @@
             </a:pPr>
             <a:r>
               <a:rPr lang="en-US" dirty="0"/>
-              <a:t>Each day will end with a group coding challenge (tiny prize for completion!)</a:t>
+              <a:t>Each day will end with a group coding challenge</a:t>
             </a:r>
           </a:p>
         </p:txBody>
@@ -12185,6 +12275,41 @@
 <file path=ppt/slides/slide5.xml><?xml version="1.0" encoding="utf-8"?>
 <p:sld xmlns:a="http://schemas.openxmlformats.org/drawingml/2006/main" xmlns:r="http://schemas.openxmlformats.org/officeDocument/2006/relationships" xmlns:p="http://schemas.openxmlformats.org/presentationml/2006/main">
   <p:cSld>
+    <p:bg>
+      <p:bgPr>
+        <a:gradFill rotWithShape="1">
+          <a:gsLst>
+            <a:gs pos="0">
+              <a:schemeClr val="bg2">
+                <a:tint val="96000"/>
+                <a:shade val="100000"/>
+                <a:hueMod val="270000"/>
+                <a:satMod val="200000"/>
+                <a:lumMod val="128000"/>
+              </a:schemeClr>
+            </a:gs>
+            <a:gs pos="50000">
+              <a:schemeClr val="bg2">
+                <a:shade val="100000"/>
+                <a:hueMod val="100000"/>
+                <a:satMod val="110000"/>
+                <a:lumMod val="130000"/>
+              </a:schemeClr>
+            </a:gs>
+            <a:gs pos="100000">
+              <a:schemeClr val="bg2">
+                <a:shade val="78000"/>
+                <a:hueMod val="44000"/>
+                <a:satMod val="200000"/>
+                <a:lumMod val="69000"/>
+              </a:schemeClr>
+            </a:gs>
+          </a:gsLst>
+          <a:lin ang="2520000" scaled="0"/>
+        </a:gradFill>
+        <a:effectLst/>
+      </p:bgPr>
+    </p:bg>
     <p:spTree>
       <p:nvGrpSpPr>
         <p:cNvPr id="1" name=""/>
@@ -12199,6 +12324,177 @@
           <a:chExt cx="0" cy="0"/>
         </a:xfrm>
       </p:grpSpPr>
+      <p:sp useBgFill="1">
+        <p:nvSpPr>
+          <p:cNvPr id="23" name="Rectangle 22">
+            <a:extLst>
+              <a:ext uri="{FF2B5EF4-FFF2-40B4-BE49-F238E27FC236}">
+                <a16:creationId xmlns:a16="http://schemas.microsoft.com/office/drawing/2014/main" id="{C610D2AE-07EF-436A-9755-AA8DF4B933A4}"/>
+              </a:ext>
+              <a:ext uri="{C183D7F6-B498-43B3-948B-1728B52AA6E4}">
+                <adec:decorative xmlns:adec="http://schemas.microsoft.com/office/drawing/2017/decorative" val="1"/>
+              </a:ext>
+            </a:extLst>
+          </p:cNvPr>
+          <p:cNvSpPr>
+            <a:spLocks noGrp="1" noRot="1" noChangeAspect="1" noMove="1" noResize="1" noEditPoints="1" noAdjustHandles="1" noChangeArrowheads="1" noChangeShapeType="1" noTextEdit="1"/>
+          </p:cNvSpPr>
+          <p:nvPr>
+            <p:extLst>
+              <p:ext uri="{386F3935-93C4-4BCD-93E2-E3B085C9AB24}">
+                <p16:designElem xmlns:p16="http://schemas.microsoft.com/office/powerpoint/2015/main" val="1"/>
+              </p:ext>
+            </p:extLst>
+          </p:nvPr>
+        </p:nvSpPr>
+        <p:spPr>
+          <a:xfrm>
+            <a:off x="0" y="-1"/>
+            <a:ext cx="12188824" cy="6858001"/>
+          </a:xfrm>
+          <a:prstGeom prst="rect">
+            <a:avLst/>
+          </a:prstGeom>
+          <a:ln>
+            <a:noFill/>
+          </a:ln>
+        </p:spPr>
+        <p:style>
+          <a:lnRef idx="2">
+            <a:schemeClr val="accent1">
+              <a:shade val="50000"/>
+            </a:schemeClr>
+          </a:lnRef>
+          <a:fillRef idx="1">
+            <a:schemeClr val="accent1"/>
+          </a:fillRef>
+          <a:effectRef idx="0">
+            <a:schemeClr val="accent1"/>
+          </a:effectRef>
+          <a:fontRef idx="minor">
+            <a:schemeClr val="lt1"/>
+          </a:fontRef>
+        </p:style>
+        <p:txBody>
+          <a:bodyPr rtlCol="0" anchor="ctr"/>
+          <a:lstStyle/>
+          <a:p>
+            <a:pPr algn="ctr"/>
+            <a:endParaRPr lang="en-US"/>
+          </a:p>
+        </p:txBody>
+      </p:sp>
+      <p:pic>
+        <p:nvPicPr>
+          <p:cNvPr id="12" name="Picture 11">
+            <a:extLst>
+              <a:ext uri="{FF2B5EF4-FFF2-40B4-BE49-F238E27FC236}">
+                <a16:creationId xmlns:a16="http://schemas.microsoft.com/office/drawing/2014/main" id="{6CACDD17-9043-46DF-882D-420365B79C18}"/>
+              </a:ext>
+              <a:ext uri="{C183D7F6-B498-43B3-948B-1728B52AA6E4}">
+                <adec:decorative xmlns:adec="http://schemas.microsoft.com/office/drawing/2017/decorative" val="1"/>
+              </a:ext>
+            </a:extLst>
+          </p:cNvPr>
+          <p:cNvPicPr>
+            <a:picLocks noGrp="1" noRot="1" noChangeAspect="1" noMove="1" noResize="1" noEditPoints="1" noAdjustHandles="1" noChangeArrowheads="1" noChangeShapeType="1" noCrop="1"/>
+          </p:cNvPicPr>
+          <p:nvPr>
+            <p:extLst>
+              <p:ext uri="{386F3935-93C4-4BCD-93E2-E3B085C9AB24}">
+                <p16:designElem xmlns:p16="http://schemas.microsoft.com/office/powerpoint/2015/main" val="1"/>
+              </p:ext>
+            </p:extLst>
+          </p:nvPr>
+        </p:nvPicPr>
+        <p:blipFill>
+          <a:blip r:embed="rId3">
+            <a:alphaModFix amt="10000"/>
+            <a:extLst>
+              <a:ext uri="{28A0092B-C50C-407E-A947-70E740481C1C}">
+                <a14:useLocalDpi xmlns:a14="http://schemas.microsoft.com/office/drawing/2010/main" val="0"/>
+              </a:ext>
+            </a:extLst>
+          </a:blip>
+          <a:stretch>
+            <a:fillRect/>
+          </a:stretch>
+        </p:blipFill>
+        <p:spPr>
+          <a:xfrm>
+            <a:off x="0" y="0"/>
+            <a:ext cx="12192000" cy="6858000"/>
+          </a:xfrm>
+          <a:prstGeom prst="rect">
+            <a:avLst/>
+          </a:prstGeom>
+        </p:spPr>
+      </p:pic>
+      <p:sp>
+        <p:nvSpPr>
+          <p:cNvPr id="14" name="Rectangle 13">
+            <a:extLst>
+              <a:ext uri="{FF2B5EF4-FFF2-40B4-BE49-F238E27FC236}">
+                <a16:creationId xmlns:a16="http://schemas.microsoft.com/office/drawing/2014/main" id="{CF2D8AD5-434A-4C0E-9F5B-C1AFD645F364}"/>
+              </a:ext>
+              <a:ext uri="{C183D7F6-B498-43B3-948B-1728B52AA6E4}">
+                <adec:decorative xmlns:adec="http://schemas.microsoft.com/office/drawing/2017/decorative" val="1"/>
+              </a:ext>
+            </a:extLst>
+          </p:cNvPr>
+          <p:cNvSpPr>
+            <a:spLocks noGrp="1" noRot="1" noChangeAspect="1" noMove="1" noResize="1" noEditPoints="1" noAdjustHandles="1" noChangeArrowheads="1" noChangeShapeType="1" noTextEdit="1"/>
+          </p:cNvSpPr>
+          <p:nvPr>
+            <p:extLst>
+              <p:ext uri="{386F3935-93C4-4BCD-93E2-E3B085C9AB24}">
+                <p16:designElem xmlns:p16="http://schemas.microsoft.com/office/powerpoint/2015/main" val="1"/>
+              </p:ext>
+            </p:extLst>
+          </p:nvPr>
+        </p:nvSpPr>
+        <p:spPr bwMode="grayWhite">
+          <a:xfrm>
+            <a:off x="2" y="609600"/>
+            <a:ext cx="4959094" cy="1368198"/>
+          </a:xfrm>
+          <a:prstGeom prst="rect">
+            <a:avLst/>
+          </a:prstGeom>
+          <a:solidFill>
+            <a:schemeClr val="bg1">
+              <a:lumMod val="85000"/>
+              <a:lumOff val="15000"/>
+            </a:schemeClr>
+          </a:solidFill>
+          <a:ln>
+            <a:noFill/>
+          </a:ln>
+        </p:spPr>
+        <p:style>
+          <a:lnRef idx="2">
+            <a:schemeClr val="accent1">
+              <a:shade val="50000"/>
+            </a:schemeClr>
+          </a:lnRef>
+          <a:fillRef idx="1">
+            <a:schemeClr val="accent1"/>
+          </a:fillRef>
+          <a:effectRef idx="0">
+            <a:schemeClr val="accent1"/>
+          </a:effectRef>
+          <a:fontRef idx="minor">
+            <a:schemeClr val="lt1"/>
+          </a:fontRef>
+        </p:style>
+        <p:txBody>
+          <a:bodyPr/>
+          <a:lstStyle/>
+          <a:p>
+            <a:endParaRPr lang="en-US"/>
+          </a:p>
+        </p:txBody>
+      </p:sp>
       <p:sp>
         <p:nvSpPr>
           <p:cNvPr id="2" name="Title 1">
@@ -12215,9 +12511,16 @@
             <p:ph type="title"/>
           </p:nvPr>
         </p:nvSpPr>
-        <p:spPr/>
-        <p:txBody>
-          <a:bodyPr/>
+        <p:spPr>
+          <a:xfrm>
+            <a:off x="680321" y="753228"/>
+            <a:ext cx="4136123" cy="1080938"/>
+          </a:xfrm>
+        </p:spPr>
+        <p:txBody>
+          <a:bodyPr>
+            <a:normAutofit/>
+          </a:bodyPr>
           <a:lstStyle/>
           <a:p>
             <a:r>
@@ -12227,6 +12530,51 @@
           </a:p>
         </p:txBody>
       </p:sp>
+      <p:pic>
+        <p:nvPicPr>
+          <p:cNvPr id="16" name="Picture 15">
+            <a:extLst>
+              <a:ext uri="{FF2B5EF4-FFF2-40B4-BE49-F238E27FC236}">
+                <a16:creationId xmlns:a16="http://schemas.microsoft.com/office/drawing/2014/main" id="{E92B246D-47CC-40F8-8DE7-B65D409E945E}"/>
+              </a:ext>
+              <a:ext uri="{C183D7F6-B498-43B3-948B-1728B52AA6E4}">
+                <adec:decorative xmlns:adec="http://schemas.microsoft.com/office/drawing/2017/decorative" val="1"/>
+              </a:ext>
+            </a:extLst>
+          </p:cNvPr>
+          <p:cNvPicPr>
+            <a:picLocks noGrp="1" noRot="1" noChangeAspect="1" noMove="1" noResize="1" noEditPoints="1" noAdjustHandles="1" noChangeArrowheads="1" noChangeShapeType="1" noCrop="1"/>
+          </p:cNvPicPr>
+          <p:nvPr>
+            <p:extLst>
+              <p:ext uri="{386F3935-93C4-4BCD-93E2-E3B085C9AB24}">
+                <p16:designElem xmlns:p16="http://schemas.microsoft.com/office/powerpoint/2015/main" val="1"/>
+              </p:ext>
+            </p:extLst>
+          </p:nvPr>
+        </p:nvPicPr>
+        <p:blipFill>
+          <a:blip r:embed="rId4">
+            <a:extLst>
+              <a:ext uri="{28A0092B-C50C-407E-A947-70E740481C1C}">
+                <a14:useLocalDpi xmlns:a14="http://schemas.microsoft.com/office/drawing/2010/main" val="0"/>
+              </a:ext>
+            </a:extLst>
+          </a:blip>
+          <a:stretch>
+            <a:fillRect/>
+          </a:stretch>
+        </p:blipFill>
+        <p:spPr>
+          <a:xfrm>
+            <a:off x="2" y="1970241"/>
+            <a:ext cx="4956048" cy="199787"/>
+          </a:xfrm>
+          <a:prstGeom prst="rect">
+            <a:avLst/>
+          </a:prstGeom>
+        </p:spPr>
+      </p:pic>
       <p:sp>
         <p:nvSpPr>
           <p:cNvPr id="3" name="Content Placeholder 2">
@@ -12245,12 +12593,14 @@
         </p:nvSpPr>
         <p:spPr>
           <a:xfrm>
-            <a:off x="433388" y="2336873"/>
-            <a:ext cx="4524376" cy="4234408"/>
-          </a:xfrm>
-        </p:spPr>
-        <p:txBody>
-          <a:bodyPr/>
+            <a:off x="500509" y="2306103"/>
+            <a:ext cx="4956048" cy="3599316"/>
+          </a:xfrm>
+        </p:spPr>
+        <p:txBody>
+          <a:bodyPr>
+            <a:noAutofit/>
+          </a:bodyPr>
           <a:lstStyle/>
           <a:p>
             <a:pPr marL="0" indent="0">
@@ -12294,17 +12644,17 @@
             </a:pPr>
             <a:r>
               <a:rPr lang="en-US" dirty="0"/>
-              <a:t>We’re aiming to get you up to the last option</a:t>
+              <a:t>We’re aiming to get you familiar with the most important parts of Python for astronomy research</a:t>
             </a:r>
           </a:p>
         </p:txBody>
       </p:sp>
       <p:pic>
         <p:nvPicPr>
-          <p:cNvPr id="10" name="Picture 9" descr="A graph with blue lines&#10;&#10;Description automatically generated">
+          <p:cNvPr id="5" name="Picture 4" descr="A graph with red lines&#10;&#10;AI-generated content may be incorrect.">
             <a:extLst>
               <a:ext uri="{FF2B5EF4-FFF2-40B4-BE49-F238E27FC236}">
-                <a16:creationId xmlns:a16="http://schemas.microsoft.com/office/drawing/2014/main" id="{FF780A86-5326-B3ED-DD50-88B49D51DD9E}"/>
+                <a16:creationId xmlns:a16="http://schemas.microsoft.com/office/drawing/2014/main" id="{9EBD7A61-A07C-F356-0C1F-4D5D987E7E88}"/>
               </a:ext>
             </a:extLst>
           </p:cNvPr>
@@ -12314,19 +12664,29 @@
           <p:nvPr/>
         </p:nvPicPr>
         <p:blipFill>
-          <a:blip r:embed="rId3"/>
+          <a:blip r:embed="rId5"/>
           <a:stretch>
             <a:fillRect/>
           </a:stretch>
         </p:blipFill>
         <p:spPr>
-          <a:xfrm>
-            <a:off x="4936763" y="1529381"/>
-            <a:ext cx="7061200" cy="5041900"/>
+          <a:xfrm rot="5400000">
+            <a:off x="5447618" y="651693"/>
+            <a:ext cx="6573509" cy="5554612"/>
           </a:xfrm>
           <a:prstGeom prst="rect">
             <a:avLst/>
           </a:prstGeom>
+          <a:ln>
+            <a:noFill/>
+          </a:ln>
+          <a:effectLst>
+            <a:outerShdw blurRad="76200" dist="63500" dir="5040000" algn="tl" rotWithShape="0">
+              <a:srgbClr val="000000">
+                <a:alpha val="41000"/>
+              </a:srgbClr>
+            </a:outerShdw>
+          </a:effectLst>
         </p:spPr>
       </p:pic>
     </p:spTree>
@@ -12467,7 +12827,7 @@
           <a:p>
             <a:r>
               <a:rPr lang="en-US" dirty="0"/>
-              <a:t>Lots of experience with other languages, especially C (yes I made one of them up)</a:t>
+              <a:t>Lots of experience with other languages, especially C/C#/C++ (yes I made one of them up)</a:t>
             </a:r>
           </a:p>
           <a:p>
@@ -12495,7 +12855,7 @@
 </file>
 
 <file path=ppt/slides/slide7.xml><?xml version="1.0" encoding="utf-8"?>
-<p:sld xmlns:a="http://schemas.openxmlformats.org/drawingml/2006/main" xmlns:r="http://schemas.openxmlformats.org/officeDocument/2006/relationships" xmlns:p="http://schemas.openxmlformats.org/presentationml/2006/main" show="0">
+<p:sld xmlns:a="http://schemas.openxmlformats.org/drawingml/2006/main" xmlns:r="http://schemas.openxmlformats.org/officeDocument/2006/relationships" xmlns:p="http://schemas.openxmlformats.org/presentationml/2006/main">
   <p:cSld>
     <p:spTree>
       <p:nvGrpSpPr>
@@ -12896,7 +13256,7 @@
         </p:spPr>
         <p:txBody>
           <a:bodyPr>
-            <a:normAutofit lnSpcReduction="10000"/>
+            <a:normAutofit fontScale="92500" lnSpcReduction="10000"/>
           </a:bodyPr>
           <a:lstStyle/>
           <a:p>
@@ -12944,13 +13304,8 @@
             </a:pPr>
             <a:r>
               <a:rPr lang="en-US" dirty="0"/>
-              <a:t>I recommend </a:t>
-            </a:r>
-            <a:r>
-              <a:rPr lang="en-US" dirty="0" err="1"/>
-              <a:t>VSCode</a:t>
-            </a:r>
-            <a:endParaRPr lang="en-US" dirty="0"/>
+              <a:t>I recommend VS Code</a:t>
+            </a:r>
           </a:p>
           <a:p>
             <a:pPr marL="0" indent="0">

--- a/day1/slides/intro.pptx
+++ b/day1/slides/intro.pptx
@@ -214,7 +214,7 @@
           <a:p>
             <a:fld id="{D49A0B7E-B595-B14C-B05F-40313997F4EC}" type="datetimeFigureOut">
               <a:rPr lang="en-US" smtClean="0"/>
-              <a:t>5/8/26</a:t>
+              <a:t>5/11/26</a:t>
             </a:fld>
             <a:endParaRPr lang="en-US"/>
           </a:p>
@@ -525,7 +525,10 @@
           <a:bodyPr/>
           <a:lstStyle/>
           <a:p>
-            <a:endParaRPr lang="en-US" dirty="0"/>
+            <a:r>
+              <a:rPr lang="en-US" dirty="0"/>
+              <a:t>Mention that today we are going to focus on getting everyone setup with Python. Then we will will do the group challenge, and exercises after if we have time.</a:t>
+            </a:r>
           </a:p>
         </p:txBody>
       </p:sp>
@@ -723,15 +726,15 @@
             </a:r>
             <a:r>
               <a:rPr lang="en-US" dirty="0"/>
-              <a:t>, instead of it being ran by your computer, it’s being ran by their own server. Basically, your computer is not doing the work and running the code, it’s the website (in this case </a:t>
+              <a:t>, instead of it being ran by your computer, it’s being ran by their own server. You will probably user </a:t>
             </a:r>
             <a:r>
               <a:rPr lang="en-US" dirty="0" err="1"/>
-              <a:t>SciServer’s</a:t>
-            </a:r>
-            <a:r>
-              <a:rPr lang="en-US" dirty="0"/>
-              <a:t>) own remote server that is executing the code and then sending the results of that code back to you to look at. Again, use the application that you are most comfortable with!</a:t>
+              <a:t>SciServer</a:t>
+            </a:r>
+            <a:r>
+              <a:rPr lang="en-US" dirty="0"/>
+              <a:t> or OSC in your research or in an astronomy class at some point.</a:t>
             </a:r>
           </a:p>
         </p:txBody>
@@ -1502,7 +1505,7 @@
           <a:p>
             <a:r>
               <a:rPr lang="en-US" dirty="0"/>
-              <a:t>We will provide some notebooks to learn and review material, but many of the exercises and group challenges are best done in text files. I encourage everyone to practice using text files in this bootcamp, since most of you are less familiar with that way of coding</a:t>
+              <a:t>We will provide some notebooks to learn and review material, but many of the exercises and group challenges are best done in text files. I encourage everyone to practice using text files in this bootcamp, since most of you are less familiar with that way of coding.</a:t>
             </a:r>
           </a:p>
           <a:p>
@@ -1819,7 +1822,7 @@
           <a:p>
             <a:r>
               <a:rPr lang="en-US" dirty="0"/>
-              <a:t>I recommend VS code because its lightweight and it has a huge number of extensions that add functionality for many programming languages and development environments.</a:t>
+              <a:t>I recommend VS code because its lightweight and it has a huge number of extensions that add functionality for many programming languages and development environments. It also integrates really well with WSL if you are on Windows.</a:t>
             </a:r>
           </a:p>
         </p:txBody>
@@ -1940,7 +1943,15 @@
             </a:r>
             <a:r>
               <a:rPr lang="en-US" dirty="0"/>
-              <a:t>. IDE’s differ from notebooks in that they will run your code for you while notebooks are applications that use the internet to run your code for you. IDE’s are a type of text editor, but are also only dedicated to one language, meaning you can only code in Python in a Python IDE, such as PyCharm or Spyder. Whereas with other text editors, you can use multiple languages. Sublime Text is a great text editor that’s not an IDE, meaning you can code in many different languages. Ultimately, it’s up to you and what you feel like is the best fit for your needs as a researcher/programmer.</a:t>
+              <a:t>. IDE’s differ from notebooks in that they will provide you with debugging and other language features while a </a:t>
+            </a:r>
+            <a:r>
+              <a:rPr lang="en-US" dirty="0" err="1"/>
+              <a:t>Jupyter</a:t>
+            </a:r>
+            <a:r>
+              <a:rPr lang="en-US" dirty="0"/>
+              <a:t> notebook is just running your code. IDE’s are sometimes built specifically for one programming language. Whereas with other text editors, you can use multiple languages. </a:t>
             </a:r>
           </a:p>
         </p:txBody>
@@ -2033,7 +2044,7 @@
           <a:p>
             <a:r>
               <a:rPr lang="en-US" dirty="0"/>
-              <a:t>The default MacOS terminal is really bad, iTerm2 allows you to have different terminal tabs and switch between them with </a:t>
+              <a:t>The default MacOS terminal is bad, iTerm2 allows you to have different terminal tabs and switch between them with </a:t>
             </a:r>
             <a:r>
               <a:rPr lang="en-US" dirty="0" err="1"/>
@@ -2372,7 +2383,7 @@
           <a:p>
             <a:fld id="{51673806-0BCD-1F42-BAA8-2011034B3C6A}" type="datetimeFigureOut">
               <a:rPr lang="en-US" smtClean="0"/>
-              <a:t>5/8/26</a:t>
+              <a:t>5/11/26</a:t>
             </a:fld>
             <a:endParaRPr lang="en-US"/>
           </a:p>
@@ -2786,7 +2797,7 @@
           <a:p>
             <a:fld id="{51673806-0BCD-1F42-BAA8-2011034B3C6A}" type="datetimeFigureOut">
               <a:rPr lang="en-US" smtClean="0"/>
-              <a:t>5/8/26</a:t>
+              <a:t>5/11/26</a:t>
             </a:fld>
             <a:endParaRPr lang="en-US"/>
           </a:p>
@@ -3117,7 +3128,7 @@
           <a:p>
             <a:fld id="{51673806-0BCD-1F42-BAA8-2011034B3C6A}" type="datetimeFigureOut">
               <a:rPr lang="en-US" smtClean="0"/>
-              <a:t>5/8/26</a:t>
+              <a:t>5/11/26</a:t>
             </a:fld>
             <a:endParaRPr lang="en-US"/>
           </a:p>
@@ -3517,7 +3528,7 @@
           <a:p>
             <a:fld id="{51673806-0BCD-1F42-BAA8-2011034B3C6A}" type="datetimeFigureOut">
               <a:rPr lang="en-US" smtClean="0"/>
-              <a:t>5/8/26</a:t>
+              <a:t>5/11/26</a:t>
             </a:fld>
             <a:endParaRPr lang="en-US"/>
           </a:p>
@@ -4080,7 +4091,7 @@
           <a:p>
             <a:fld id="{51673806-0BCD-1F42-BAA8-2011034B3C6A}" type="datetimeFigureOut">
               <a:rPr lang="en-US" smtClean="0"/>
-              <a:t>5/8/26</a:t>
+              <a:t>5/11/26</a:t>
             </a:fld>
             <a:endParaRPr lang="en-US"/>
           </a:p>
@@ -4756,7 +4767,7 @@
           <a:p>
             <a:fld id="{51673806-0BCD-1F42-BAA8-2011034B3C6A}" type="datetimeFigureOut">
               <a:rPr lang="en-US" smtClean="0"/>
-              <a:t>5/8/26</a:t>
+              <a:t>5/11/26</a:t>
             </a:fld>
             <a:endParaRPr lang="en-US"/>
           </a:p>
@@ -5664,7 +5675,7 @@
           <a:p>
             <a:fld id="{51673806-0BCD-1F42-BAA8-2011034B3C6A}" type="datetimeFigureOut">
               <a:rPr lang="en-US" smtClean="0"/>
-              <a:t>5/8/26</a:t>
+              <a:t>5/11/26</a:t>
             </a:fld>
             <a:endParaRPr lang="en-US"/>
           </a:p>
@@ -5972,7 +5983,7 @@
           <a:p>
             <a:fld id="{51673806-0BCD-1F42-BAA8-2011034B3C6A}" type="datetimeFigureOut">
               <a:rPr lang="en-US" smtClean="0"/>
-              <a:t>5/8/26</a:t>
+              <a:t>5/11/26</a:t>
             </a:fld>
             <a:endParaRPr lang="en-US"/>
           </a:p>
@@ -6231,7 +6242,7 @@
           <a:p>
             <a:fld id="{51673806-0BCD-1F42-BAA8-2011034B3C6A}" type="datetimeFigureOut">
               <a:rPr lang="en-US" smtClean="0"/>
-              <a:t>5/8/26</a:t>
+              <a:t>5/11/26</a:t>
             </a:fld>
             <a:endParaRPr lang="en-US"/>
           </a:p>
@@ -6568,7 +6579,7 @@
           <a:p>
             <a:fld id="{51673806-0BCD-1F42-BAA8-2011034B3C6A}" type="datetimeFigureOut">
               <a:rPr lang="en-US" smtClean="0"/>
-              <a:t>5/8/26</a:t>
+              <a:t>5/11/26</a:t>
             </a:fld>
             <a:endParaRPr lang="en-US"/>
           </a:p>
@@ -6952,7 +6963,7 @@
           <a:p>
             <a:fld id="{51673806-0BCD-1F42-BAA8-2011034B3C6A}" type="datetimeFigureOut">
               <a:rPr lang="en-US" smtClean="0"/>
-              <a:t>5/8/26</a:t>
+              <a:t>5/11/26</a:t>
             </a:fld>
             <a:endParaRPr lang="en-US"/>
           </a:p>
@@ -7328,7 +7339,7 @@
           <a:p>
             <a:fld id="{51673806-0BCD-1F42-BAA8-2011034B3C6A}" type="datetimeFigureOut">
               <a:rPr lang="en-US" smtClean="0"/>
-              <a:t>5/8/26</a:t>
+              <a:t>5/11/26</a:t>
             </a:fld>
             <a:endParaRPr lang="en-US"/>
           </a:p>
@@ -7834,7 +7845,7 @@
           <a:p>
             <a:fld id="{51673806-0BCD-1F42-BAA8-2011034B3C6A}" type="datetimeFigureOut">
               <a:rPr lang="en-US" smtClean="0"/>
-              <a:t>5/8/26</a:t>
+              <a:t>5/11/26</a:t>
             </a:fld>
             <a:endParaRPr lang="en-US"/>
           </a:p>
@@ -8091,7 +8102,7 @@
           <a:p>
             <a:fld id="{51673806-0BCD-1F42-BAA8-2011034B3C6A}" type="datetimeFigureOut">
               <a:rPr lang="en-US" smtClean="0"/>
-              <a:t>5/8/26</a:t>
+              <a:t>5/11/26</a:t>
             </a:fld>
             <a:endParaRPr lang="en-US"/>
           </a:p>
@@ -8249,7 +8260,7 @@
           <a:p>
             <a:fld id="{51673806-0BCD-1F42-BAA8-2011034B3C6A}" type="datetimeFigureOut">
               <a:rPr lang="en-US" smtClean="0"/>
-              <a:t>5/8/26</a:t>
+              <a:t>5/11/26</a:t>
             </a:fld>
             <a:endParaRPr lang="en-US"/>
           </a:p>
@@ -8639,7 +8650,7 @@
           <a:p>
             <a:fld id="{51673806-0BCD-1F42-BAA8-2011034B3C6A}" type="datetimeFigureOut">
               <a:rPr lang="en-US" smtClean="0"/>
-              <a:t>5/8/26</a:t>
+              <a:t>5/11/26</a:t>
             </a:fld>
             <a:endParaRPr lang="en-US"/>
           </a:p>
@@ -9048,7 +9059,7 @@
           <a:p>
             <a:fld id="{51673806-0BCD-1F42-BAA8-2011034B3C6A}" type="datetimeFigureOut">
               <a:rPr lang="en-US" smtClean="0"/>
-              <a:t>5/8/26</a:t>
+              <a:t>5/11/26</a:t>
             </a:fld>
             <a:endParaRPr lang="en-US"/>
           </a:p>
@@ -9294,7 +9305,7 @@
             <a:fld id="{51673806-0BCD-1F42-BAA8-2011034B3C6A}" type="datetimeFigureOut">
               <a:rPr lang="en-US" smtClean="0"/>
               <a:pPr/>
-              <a:t>5/8/26</a:t>
+              <a:t>5/11/26</a:t>
             </a:fld>
             <a:endParaRPr lang="en-US" dirty="0"/>
           </a:p>
@@ -9862,7 +9873,9 @@
           </a:xfrm>
         </p:spPr>
         <p:txBody>
-          <a:bodyPr/>
+          <a:bodyPr>
+            <a:normAutofit lnSpcReduction="10000"/>
+          </a:bodyPr>
           <a:lstStyle/>
           <a:p>
             <a:pPr marL="0" indent="0">
@@ -9893,7 +9906,7 @@
             </a:pPr>
             <a:r>
               <a:rPr lang="en-US" dirty="0"/>
-              <a:t>Lots of options – some run right in the terminal (Emacs, VIM)</a:t>
+              <a:t>Lots of options – some run right in the terminal (Emacs, VIM, nano)</a:t>
             </a:r>
           </a:p>
           <a:p>
@@ -9908,7 +9921,7 @@
             </a:pPr>
             <a:r>
               <a:rPr lang="en-US" dirty="0"/>
-              <a:t>I recommend using VS Code as a text editor too. </a:t>
+              <a:t>I recommend using VS Code for a GUI text editor and vim or nano for a command line editor.</a:t>
             </a:r>
           </a:p>
         </p:txBody>
@@ -10199,7 +10212,9 @@
           </a:xfrm>
         </p:spPr>
         <p:txBody>
-          <a:bodyPr/>
+          <a:bodyPr>
+            <a:normAutofit lnSpcReduction="10000"/>
+          </a:bodyPr>
           <a:lstStyle/>
           <a:p>
             <a:pPr marL="0" indent="0">
@@ -10222,7 +10237,7 @@
             </a:pPr>
             <a:r>
               <a:rPr lang="en-US" dirty="0"/>
-              <a:t>Once you learn the basics, Linux isn’t that hard (I promise)</a:t>
+              <a:t>Linux has a steep learning curve to begin with, but gets easier as you get more comfortable.</a:t>
             </a:r>
           </a:p>
           <a:p>
@@ -11546,7 +11561,7 @@
         </p:spPr>
         <p:txBody>
           <a:bodyPr>
-            <a:normAutofit/>
+            <a:normAutofit lnSpcReduction="10000"/>
           </a:bodyPr>
           <a:lstStyle/>
           <a:p>
@@ -11556,8 +11571,13 @@
             </a:pPr>
             <a:r>
               <a:rPr lang="en-US" dirty="0"/>
-              <a:t>Get into groups – all experience levels in each group</a:t>
-            </a:r>
+              <a:t>Slides: context, terminal, </a:t>
+            </a:r>
+            <a:r>
+              <a:rPr lang="en-US" dirty="0" err="1"/>
+              <a:t>github</a:t>
+            </a:r>
+            <a:endParaRPr lang="en-US" dirty="0"/>
           </a:p>
           <a:p>
             <a:pPr marL="457200" indent="-457200">
@@ -11566,7 +11586,7 @@
             </a:pPr>
             <a:r>
               <a:rPr lang="en-US" dirty="0"/>
-              <a:t>Slides: context of Python</a:t>
+              <a:t>Get into groups – all experience levels in each group</a:t>
             </a:r>
           </a:p>
           <a:p>
@@ -11576,13 +11596,8 @@
             </a:pPr>
             <a:r>
               <a:rPr lang="en-US" dirty="0"/>
-              <a:t>Install Anaconda (unless you already have </a:t>
-            </a:r>
-            <a:r>
-              <a:rPr lang="en-US"/>
-              <a:t>a Python install you can use)</a:t>
-            </a:r>
-            <a:endParaRPr lang="en-US" dirty="0"/>
+              <a:t>Install Anaconda (unless you already have a Python install you can use)</a:t>
+            </a:r>
           </a:p>
           <a:p>
             <a:pPr marL="457200" indent="-457200">
@@ -11662,6 +11677,21 @@
               <a:rPr lang="en-US" dirty="0"/>
               <a:t>Group challenge: terminal quest!</a:t>
             </a:r>
+          </a:p>
+          <a:p>
+            <a:pPr marL="457200" indent="-457200">
+              <a:buFont typeface="+mj-lt"/>
+              <a:buAutoNum type="arabicPeriod"/>
+            </a:pPr>
+            <a:r>
+              <a:rPr lang="en-US" dirty="0"/>
+              <a:t>Individual exercises (</a:t>
+            </a:r>
+            <a:r>
+              <a:rPr lang="en-US"/>
+              <a:t>as time allows)</a:t>
+            </a:r>
+            <a:endParaRPr lang="en-US" dirty="0"/>
           </a:p>
         </p:txBody>
       </p:sp>
@@ -11831,41 +11861,6 @@
               <a:t> year undergrad)</a:t>
             </a:r>
           </a:p>
-          <a:p>
-            <a:pPr lvl="1">
-              <a:lnSpc>
-                <a:spcPct val="100000"/>
-              </a:lnSpc>
-              <a:spcBef>
-                <a:spcPts val="0"/>
-              </a:spcBef>
-            </a:pPr>
-            <a:r>
-              <a:rPr lang="en-US" sz="2400" dirty="0"/>
-              <a:t>Sai </a:t>
-            </a:r>
-            <a:r>
-              <a:rPr lang="en-US" sz="2400" dirty="0" err="1"/>
-              <a:t>Vidyud</a:t>
-            </a:r>
-            <a:r>
-              <a:rPr lang="en-US" sz="2400" dirty="0"/>
-              <a:t> Senthil Nathan (senior undergrad)</a:t>
-            </a:r>
-            <a:endParaRPr lang="en-US" dirty="0"/>
-          </a:p>
-          <a:p>
-            <a:pPr marL="0" indent="0">
-              <a:lnSpc>
-                <a:spcPct val="100000"/>
-              </a:lnSpc>
-              <a:spcBef>
-                <a:spcPts val="0"/>
-              </a:spcBef>
-              <a:buNone/>
-            </a:pPr>
-            <a:endParaRPr lang="en-US" dirty="0"/>
-          </a:p>
         </p:txBody>
       </p:sp>
     </p:spTree>
@@ -12083,7 +12078,7 @@
             </a:pPr>
             <a:r>
               <a:rPr lang="en-US" dirty="0"/>
-              <a:t>Each day will end with a group coding challenge</a:t>
+              <a:t>Each day will have a group coding challenge</a:t>
             </a:r>
           </a:p>
         </p:txBody>
@@ -12215,7 +12210,7 @@
             </a:pPr>
             <a:r>
               <a:rPr lang="en-US" dirty="0"/>
-              <a:t>Material is very condensed to fit into five sessions – mastery of these skills will come over time, even beyond this summer</a:t>
+              <a:t>Material is very condensed to fit into five sessions – mastery of these skills will come over time, even beyond this summer.</a:t>
             </a:r>
           </a:p>
           <a:p>
@@ -12240,9 +12235,21 @@
               </a:spcBef>
               <a:buNone/>
             </a:pPr>
-            <a:r>
-              <a:rPr lang="en-US" dirty="0"/>
-              <a:t>In the long run, what you get out of this will reflect what you put into it</a:t>
+            <a:endParaRPr lang="en-US" dirty="0"/>
+          </a:p>
+          <a:p>
+            <a:pPr marL="0" indent="0">
+              <a:lnSpc>
+                <a:spcPct val="100000"/>
+              </a:lnSpc>
+              <a:spcBef>
+                <a:spcPts val="0"/>
+              </a:spcBef>
+              <a:buNone/>
+            </a:pPr>
+            <a:r>
+              <a:rPr lang="en-US" dirty="0"/>
+              <a:t>I will go through some of the slides quickly, so we don’t expect you to get everything right away. You can always review them later.</a:t>
             </a:r>
           </a:p>
           <a:p>
@@ -12671,7 +12678,7 @@
         </p:blipFill>
         <p:spPr>
           <a:xfrm rot="5400000">
-            <a:off x="5447618" y="651693"/>
+            <a:off x="5447618" y="663885"/>
             <a:ext cx="6573509" cy="5554612"/>
           </a:xfrm>
           <a:prstGeom prst="rect">
@@ -12807,12 +12814,6 @@
           <a:p>
             <a:r>
               <a:rPr lang="en-US" dirty="0"/>
-              <a:t>~Half have written a class before (!), and most know how to import their own code</a:t>
-            </a:r>
-          </a:p>
-          <a:p>
-            <a:r>
-              <a:rPr lang="en-US" dirty="0"/>
               <a:t>Most use </a:t>
             </a:r>
             <a:r>
@@ -12827,7 +12828,7 @@
           <a:p>
             <a:r>
               <a:rPr lang="en-US" dirty="0"/>
-              <a:t>Lots of experience with other languages, especially C/C#/C++ (yes I made one of them up)</a:t>
+              <a:t>Lots of experience with other languages, especially C/C#/C++ </a:t>
             </a:r>
           </a:p>
           <a:p>

--- a/day1/slides/intro.pptx
+++ b/day1/slides/intro.pptx
@@ -9781,8 +9781,13 @@
           <a:p>
             <a:r>
               <a:rPr lang="en-US" dirty="0"/>
-              <a:t>Slides by: James W. Johnson and Liam Dubay</a:t>
-            </a:r>
+              <a:t>Slides by: James W. Johnson, Liam Dubay, and </a:t>
+            </a:r>
+            <a:r>
+              <a:rPr lang="en-US"/>
+              <a:t>Jackson Datkuliak</a:t>
+            </a:r>
+            <a:endParaRPr lang="en-US" dirty="0"/>
           </a:p>
         </p:txBody>
       </p:sp>

--- a/day1/slides/intro.pptx
+++ b/day1/slides/intro.pptx
@@ -9781,13 +9781,8 @@
           <a:p>
             <a:r>
               <a:rPr lang="en-US" dirty="0"/>
-              <a:t>Slides by: James W. Johnson, Liam Dubay, and </a:t>
-            </a:r>
-            <a:r>
-              <a:rPr lang="en-US"/>
-              <a:t>Jackson Datkuliak</a:t>
-            </a:r>
-            <a:endParaRPr lang="en-US" dirty="0"/>
+              <a:t>Slides by: James W. Johnson, Liam Dubay, and Jackson Datkuliak</a:t>
+            </a:r>
           </a:p>
         </p:txBody>
       </p:sp>
@@ -11833,7 +11828,7 @@
             </a:pPr>
             <a:r>
               <a:rPr lang="en-US" sz="2400" dirty="0"/>
-              <a:t>Jack Roberts (7</a:t>
+              <a:t>Jack Roberts (6</a:t>
             </a:r>
             <a:r>
               <a:rPr lang="en-US" sz="2400" baseline="30000" dirty="0"/>
